--- a/decks/englit-macbeth/englit-macbeth_ch6_exam-essay-skills.pptx
+++ b/decks/englit-macbeth/englit-macbeth_ch6_exam-essay-skills.pptx
@@ -124,35 +124,35 @@
   <p:extLst>
     <p:ext uri="{521415D9-36F7-43E2-AB2F-B90AF26B5E84}">
       <p14:sectionLst xmlns:p14="http://schemas.microsoft.com/office/powerpoint/2010/main">
-        <p14:section name="Opening" id="{7c9f20f2-b623-8b33-370a-3775c1530e2b}">
+        <p14:section name="Opening" id="{4565dad7-d320-86e2-55eb-907ce0e590f9}">
           <p14:sldIdLst>
             <p14:sldId id="256"/>
           </p14:sldIdLst>
         </p14:section>
-        <p14:section name="Gate" id="{eda97a38-242a-026b-cab6-31779d75bb0e}">
+        <p14:section name="Gate" id="{3b730b44-ac8b-2df3-324e-aabdce77ed02}">
           <p14:sldIdLst>
             <p14:sldId id="257"/>
             <p14:sldId id="258"/>
           </p14:sldIdLst>
         </p14:section>
-        <p14:section name="Pre-teach" id="{7bcdb05b-847b-0389-39f7-c6ca51f4ffbf}">
+        <p14:section name="Pre-teach" id="{2a533f3a-bc99-52bc-fc02-ef8fe8e6a1ba}">
           <p14:sldIdLst>
             <p14:sldId id="259"/>
           </p14:sldIdLst>
         </p14:section>
-        <p14:section name="Read-along" id="{a8223975-17b8-53f6-e5f8-5ac419dd9eda}">
+        <p14:section name="Read-along" id="{f607868d-7832-1852-0404-ced396d203ed}">
           <p14:sldIdLst>
             <p14:sldId id="260"/>
           </p14:sldIdLst>
         </p14:section>
-        <p14:section name="Teach" id="{87c925b4-ccd8-bbf2-d416-86d0acd42d56}">
+        <p14:section name="Teach" id="{c553d624-b2c9-34e2-9446-c9d6d6945341}">
           <p14:sldIdLst>
             <p14:sldId id="261"/>
             <p14:sldId id="262"/>
             <p14:sldId id="263"/>
           </p14:sldIdLst>
         </p14:section>
-        <p14:section name="Routes" id="{4e5f8c49-2c69-43ab-13ea-4c60376d682a}">
+        <p14:section name="Routes" id="{8a136471-b943-c29a-f7e2-28228cdc598a}">
           <p14:sldIdLst>
             <p14:sldId id="264"/>
             <p14:sldId id="265"/>
@@ -161,12 +161,12 @@
             <p14:sldId id="268"/>
           </p14:sldIdLst>
         </p14:section>
-        <p14:section name="Close" id="{1ff985cf-e928-c967-7100-f96819da649a}">
+        <p14:section name="Close" id="{5cae2293-b293-4094-22ad-4cda1862ecbb}">
           <p14:sldIdLst>
             <p14:sldId id="269"/>
           </p14:sldIdLst>
         </p14:section>
-        <p14:section name="Answers" id="{23b7076d-a4ab-c516-eace-9fb8e14d980e}">
+        <p14:section name="Answers" id="{58e695c0-8a14-2600-51ff-28de9043e810}">
           <p14:sldIdLst>
             <p14:sldId id="270"/>
             <p14:sldId id="271"/>
@@ -1047,7 +1047,7 @@
               <a:rPr lang="en-US" dirty="0"/>
               <a:t>Exit ticket — individual, silent, on a slip or mini-whiteboard. Recall before help: no notes, no lanes, no hints. Collect before pupils leave.
 Question: Which sentence weaves context in best?
-Answer: B   Macduff calls the murder “sacrilegious”, a word that turns regicide into an attack on God, as the divine right of kings would lead a Jacobean audience to feel.. Only option B joins a quotation, its effect and the context in one sentence. The others state context without linking it to the play.
+Answer: C   Macduff calls the murder “sacrilegious”, a word that turns regicide into an attack on God, as the divine right of kings would lead a Jacobean audience to feel.. Only option B joins a quotation, its effect and the context in one sentence. The others state context without linking it to the play.
 Source of this question: module 3 task ("Weaving context in") from the manifest.
 Sort the slips: correct → ready to move on; incorrect → start next lesson in the pre-teach group, with the read-along and the Support lane. Same destination next time.</a:t>
             </a:r>
@@ -1415,7 +1415,7 @@
             <a:r>
               <a:rPr lang="en-US" dirty="0"/>
               <a:t>Answers — exit ticket: Exit ticket. Reveal the answer; pupils mark their own work in a different colour, then read the "why" together. Same destination for every lane, so one answer serves the whole class.
-Answer: B   Macduff calls the murder “sacrilegious”, a word that turns regicide into an attack on God, as the divine right of kings would lead a Jacobean audience to feel.
+Answer: C   Macduff calls the murder “sacrilegious”, a word that turns regicide into an attack on God, as the divine right of kings would lead a Jacobean audience to feel.
 Why: Only option B joins a quotation, its effect and the context in one sentence. The others state context without linking it to the play.
 Ask a Support pupil to explain one step, and a Stretch pupil to share their extension.</a:t>
             </a:r>
@@ -1506,9 +1506,9 @@
             <a:r>
               <a:rPr lang="en-US" dirty="0"/>
               <a:t>Do now — retrieval. Silent, no notes, no help: recall comes before any support. Give about four minutes.
-1. Which assessment objective is about context?  →  C   AO3
+1. Which assessment objective is about context?  →  A   AO3
 2. How many marks is the Macbeth question worth, not counting the 4 marks for spelling, punctuation and grammar?  →  30 marks
-3. Which sentence embeds a quotation best?  →  B   Macbeth admits his mind is “full of scorpions”, an image of thoughts that sting and poison him.
+3. Which sentence embeds a quotation best?  →  C   Macbeth admits his mind is “full of scorpions”, an image of thoughts that sting and poison him.
 Circulate: who gets 3/3 (Stretch route), 2/3 (Core), 0–1 (Support)? Use this to route pupils later in the lesson.</a:t>
             </a:r>
             <a:endParaRPr lang="en-US" dirty="0"/>
@@ -1598,9 +1598,9 @@
             <a:r>
               <a:rPr lang="en-US" dirty="0"/>
               <a:t>Answers — pupils mark their own in a different colour, then hands up for 3/3, 2/3, 1/3.
-1. C   AO3. AO3 is the link between the play and the world it was written in.
+1. A   AO3. AO3 is the link between the play and the world it was written in.
 2. 30 marks. 30 marks for your response, plus 4 for AO4, makes 34 marks for the Shakespeare section.
-3. B   Macbeth admits his mind is “full of scorpions”, an image of thoughts that sting and poison him.. The best option fits a short quotation into the writer's own sentence and explains it straight away.
+3. C   Macbeth admits his mind is “full of scorpions”, an image of thoughts that sting and poison him.. The best option fits a short quotation into the writer's own sentence and explains it straight away.
 Say the route each score points to: 3/3 Stretch, 2/3 Core, 0–1 Support. Pupils may choose to move up.</a:t>
             </a:r>
             <a:endParaRPr lang="en-US" dirty="0"/>
@@ -6839,7 +6839,7 @@
                 <a:ea typeface="Calibri" pitchFamily="34" charset="-122"/>
                 <a:cs typeface="Calibri" pitchFamily="34" charset="-120"/>
               </a:rPr>
-              <a:t>Macbeth kills Duncan. In 1606 people believed in the divine right of kings.</a:t>
+              <a:t>The divine right of kings was a belief in Shakespeare's time that kings were chosen by God.</a:t>
             </a:r>
             <a:endParaRPr lang="en-US" sz="2000" dirty="0"/>
           </a:p>
@@ -6876,7 +6876,7 @@
                 <a:ea typeface="Calibri" pitchFamily="34" charset="-122"/>
                 <a:cs typeface="Calibri" pitchFamily="34" charset="-120"/>
               </a:rPr>
-              <a:t>Macduff calls the murder “sacrilegious”, a word that turns regicide into an attack on God, as the divine right of kings would lead a Jacobean audience to feel.</a:t>
+              <a:t>Shakespeare's audience had many beliefs, such as the divine right of kings.</a:t>
             </a:r>
             <a:endParaRPr lang="en-US" sz="2000" dirty="0"/>
           </a:p>
@@ -6913,7 +6913,7 @@
                 <a:ea typeface="Calibri" pitchFamily="34" charset="-122"/>
                 <a:cs typeface="Calibri" pitchFamily="34" charset="-120"/>
               </a:rPr>
-              <a:t>The divine right of kings was a belief in Shakespeare's time that kings were chosen by God.</a:t>
+              <a:t>Macduff calls the murder “sacrilegious”, a word that turns regicide into an attack on God, as the divine right of kings would lead a Jacobean audience to feel.</a:t>
             </a:r>
             <a:endParaRPr lang="en-US" sz="2000" dirty="0"/>
           </a:p>
@@ -6950,7 +6950,7 @@
                 <a:ea typeface="Calibri" pitchFamily="34" charset="-122"/>
                 <a:cs typeface="Calibri" pitchFamily="34" charset="-120"/>
               </a:rPr>
-              <a:t>Shakespeare's audience had many beliefs, such as the divine right of kings.</a:t>
+              <a:t>Macbeth kills Duncan. In 1606 people believed in the divine right of kings.</a:t>
             </a:r>
             <a:endParaRPr lang="en-US" sz="2000" dirty="0"/>
           </a:p>
@@ -8997,7 +8997,7 @@
                 <a:ea typeface="Cambria" pitchFamily="34" charset="-122"/>
                 <a:cs typeface="Cambria" pitchFamily="34" charset="-120"/>
               </a:rPr>
-              <a:t>B   Macduff calls the murder “sacrilegious”, a word that turns regicide into an attack on God, as the divine right of kings would lead a Jacobean audience to feel.</a:t>
+              <a:t>C   Macduff calls the murder “sacrilegious”, a word that turns regicide into an attack on God, as the divine right of kings would lead a Jacobean audience to feel.</a:t>
             </a:r>
             <a:endParaRPr lang="en-US" sz="1800" dirty="0"/>
           </a:p>
@@ -9501,7 +9501,7 @@
           <a:p>
             <a:pPr algn="l" indent="0" marL="0">
               <a:spcAft>
-                <a:spcPts val="600"/>
+                <a:spcPts val="200"/>
               </a:spcAft>
               <a:buNone/>
             </a:pPr>
@@ -9518,7 +9518,7 @@
             </a:r>
             <a:pPr algn="l" indent="0" marL="0">
               <a:spcAft>
-                <a:spcPts val="600"/>
+                <a:spcPts val="200"/>
               </a:spcAft>
               <a:buNone/>
             </a:pPr>
@@ -9531,6 +9531,80 @@
                 <a:ea typeface="Calibri" pitchFamily="34" charset="-122"/>
                 <a:cs typeface="Calibri" pitchFamily="34" charset="-120"/>
               </a:rPr>
+              <a:t>AO3</a:t>
+            </a:r>
+            <a:endParaRPr lang="en-US" sz="2400" dirty="0"/>
+          </a:p>
+          <a:p>
+            <a:pPr algn="l" indent="0" marL="0">
+              <a:spcAft>
+                <a:spcPts val="200"/>
+              </a:spcAft>
+              <a:buNone/>
+            </a:pPr>
+            <a:r>
+              <a:rPr lang="en-US" sz="2400" b="1" dirty="0">
+                <a:solidFill>
+                  <a:srgbClr val="B8862B"/>
+                </a:solidFill>
+                <a:latin typeface="Calibri" pitchFamily="34" charset="0"/>
+                <a:ea typeface="Calibri" pitchFamily="34" charset="-122"/>
+                <a:cs typeface="Calibri" pitchFamily="34" charset="-120"/>
+              </a:rPr>
+              <a:t>B   </a:t>
+            </a:r>
+            <a:pPr algn="l" indent="0" marL="0">
+              <a:spcAft>
+                <a:spcPts val="200"/>
+              </a:spcAft>
+              <a:buNone/>
+            </a:pPr>
+            <a:r>
+              <a:rPr lang="en-US" sz="2400" dirty="0">
+                <a:solidFill>
+                  <a:srgbClr val="1E2229"/>
+                </a:solidFill>
+                <a:latin typeface="Calibri" pitchFamily="34" charset="0"/>
+                <a:ea typeface="Calibri" pitchFamily="34" charset="-122"/>
+                <a:cs typeface="Calibri" pitchFamily="34" charset="-120"/>
+              </a:rPr>
+              <a:t>AO4</a:t>
+            </a:r>
+            <a:endParaRPr lang="en-US" sz="2400" dirty="0"/>
+          </a:p>
+          <a:p>
+            <a:pPr algn="l" indent="0" marL="0">
+              <a:spcAft>
+                <a:spcPts val="200"/>
+              </a:spcAft>
+              <a:buNone/>
+            </a:pPr>
+            <a:r>
+              <a:rPr lang="en-US" sz="2400" b="1" dirty="0">
+                <a:solidFill>
+                  <a:srgbClr val="B8862B"/>
+                </a:solidFill>
+                <a:latin typeface="Calibri" pitchFamily="34" charset="0"/>
+                <a:ea typeface="Calibri" pitchFamily="34" charset="-122"/>
+                <a:cs typeface="Calibri" pitchFamily="34" charset="-120"/>
+              </a:rPr>
+              <a:t>C   </a:t>
+            </a:r>
+            <a:pPr algn="l" indent="0" marL="0">
+              <a:spcAft>
+                <a:spcPts val="200"/>
+              </a:spcAft>
+              <a:buNone/>
+            </a:pPr>
+            <a:r>
+              <a:rPr lang="en-US" sz="2400" dirty="0">
+                <a:solidFill>
+                  <a:srgbClr val="1E2229"/>
+                </a:solidFill>
+                <a:latin typeface="Calibri" pitchFamily="34" charset="0"/>
+                <a:ea typeface="Calibri" pitchFamily="34" charset="-122"/>
+                <a:cs typeface="Calibri" pitchFamily="34" charset="-120"/>
+              </a:rPr>
               <a:t>AO1</a:t>
             </a:r>
             <a:endParaRPr lang="en-US" sz="2400" dirty="0"/>
@@ -9538,7 +9612,7 @@
           <a:p>
             <a:pPr algn="l" indent="0" marL="0">
               <a:spcAft>
-                <a:spcPts val="600"/>
+                <a:spcPts val="200"/>
               </a:spcAft>
               <a:buNone/>
             </a:pPr>
@@ -9551,11 +9625,11 @@
                 <a:ea typeface="Calibri" pitchFamily="34" charset="-122"/>
                 <a:cs typeface="Calibri" pitchFamily="34" charset="-120"/>
               </a:rPr>
-              <a:t>B   </a:t>
+              <a:t>D   </a:t>
             </a:r>
             <a:pPr algn="l" indent="0" marL="0">
               <a:spcAft>
-                <a:spcPts val="600"/>
+                <a:spcPts val="200"/>
               </a:spcAft>
               <a:buNone/>
             </a:pPr>
@@ -9569,80 +9643,6 @@
                 <a:cs typeface="Calibri" pitchFamily="34" charset="-120"/>
               </a:rPr>
               <a:t>AO2</a:t>
-            </a:r>
-            <a:endParaRPr lang="en-US" sz="2400" dirty="0"/>
-          </a:p>
-          <a:p>
-            <a:pPr algn="l" indent="0" marL="0">
-              <a:spcAft>
-                <a:spcPts val="600"/>
-              </a:spcAft>
-              <a:buNone/>
-            </a:pPr>
-            <a:r>
-              <a:rPr lang="en-US" sz="2400" b="1" dirty="0">
-                <a:solidFill>
-                  <a:srgbClr val="B8862B"/>
-                </a:solidFill>
-                <a:latin typeface="Calibri" pitchFamily="34" charset="0"/>
-                <a:ea typeface="Calibri" pitchFamily="34" charset="-122"/>
-                <a:cs typeface="Calibri" pitchFamily="34" charset="-120"/>
-              </a:rPr>
-              <a:t>C   </a:t>
-            </a:r>
-            <a:pPr algn="l" indent="0" marL="0">
-              <a:spcAft>
-                <a:spcPts val="600"/>
-              </a:spcAft>
-              <a:buNone/>
-            </a:pPr>
-            <a:r>
-              <a:rPr lang="en-US" sz="2400" dirty="0">
-                <a:solidFill>
-                  <a:srgbClr val="1E2229"/>
-                </a:solidFill>
-                <a:latin typeface="Calibri" pitchFamily="34" charset="0"/>
-                <a:ea typeface="Calibri" pitchFamily="34" charset="-122"/>
-                <a:cs typeface="Calibri" pitchFamily="34" charset="-120"/>
-              </a:rPr>
-              <a:t>AO3</a:t>
-            </a:r>
-            <a:endParaRPr lang="en-US" sz="2400" dirty="0"/>
-          </a:p>
-          <a:p>
-            <a:pPr algn="l" indent="0" marL="0">
-              <a:spcAft>
-                <a:spcPts val="600"/>
-              </a:spcAft>
-              <a:buNone/>
-            </a:pPr>
-            <a:r>
-              <a:rPr lang="en-US" sz="2400" b="1" dirty="0">
-                <a:solidFill>
-                  <a:srgbClr val="B8862B"/>
-                </a:solidFill>
-                <a:latin typeface="Calibri" pitchFamily="34" charset="0"/>
-                <a:ea typeface="Calibri" pitchFamily="34" charset="-122"/>
-                <a:cs typeface="Calibri" pitchFamily="34" charset="-120"/>
-              </a:rPr>
-              <a:t>D   </a:t>
-            </a:r>
-            <a:pPr algn="l" indent="0" marL="0">
-              <a:spcAft>
-                <a:spcPts val="600"/>
-              </a:spcAft>
-              <a:buNone/>
-            </a:pPr>
-            <a:r>
-              <a:rPr lang="en-US" sz="2400" dirty="0">
-                <a:solidFill>
-                  <a:srgbClr val="1E2229"/>
-                </a:solidFill>
-                <a:latin typeface="Calibri" pitchFamily="34" charset="0"/>
-                <a:ea typeface="Calibri" pitchFamily="34" charset="-122"/>
-                <a:cs typeface="Calibri" pitchFamily="34" charset="-120"/>
-              </a:rPr>
-              <a:t>AO4</a:t>
             </a:r>
             <a:endParaRPr lang="en-US" sz="2400" dirty="0"/>
           </a:p>
@@ -9999,7 +9999,7 @@
               <a:buNone/>
             </a:pPr>
             <a:r>
-              <a:rPr lang="en-US" sz="2000" b="1" dirty="0">
+              <a:rPr lang="en-US" sz="1800" b="1" dirty="0">
                 <a:solidFill>
                   <a:srgbClr val="1E2229"/>
                 </a:solidFill>
@@ -10009,7 +10009,7 @@
               </a:rPr>
               <a:t>Which sentence embeds a quotation best?</a:t>
             </a:r>
-            <a:endParaRPr lang="en-US" sz="2000" dirty="0"/>
+            <a:endParaRPr lang="en-US" sz="1800" dirty="0"/>
           </a:p>
           <a:p>
             <a:pPr algn="l" indent="0" marL="0">
@@ -10019,7 +10019,7 @@
               <a:buNone/>
             </a:pPr>
             <a:r>
-              <a:rPr lang="en-US" sz="2000" b="1" dirty="0">
+              <a:rPr lang="en-US" sz="1800" b="1" dirty="0">
                 <a:solidFill>
                   <a:srgbClr val="B8862B"/>
                 </a:solidFill>
@@ -10036,7 +10036,7 @@
               <a:buNone/>
             </a:pPr>
             <a:r>
-              <a:rPr lang="en-US" sz="2000" dirty="0">
+              <a:rPr lang="en-US" sz="1800" dirty="0">
                 <a:solidFill>
                   <a:srgbClr val="1E2229"/>
                 </a:solidFill>
@@ -10044,9 +10044,9 @@
                 <a:ea typeface="Calibri" pitchFamily="34" charset="-122"/>
                 <a:cs typeface="Calibri" pitchFamily="34" charset="-120"/>
               </a:rPr>
-              <a:t>Macbeth is scared. Quote: “O, full of scorpions is my mind, dear wife!”</a:t>
-            </a:r>
-            <a:endParaRPr lang="en-US" sz="2000" dirty="0"/>
+              <a:t>Macbeth says a quote about scorpions in Act 3.</a:t>
+            </a:r>
+            <a:endParaRPr lang="en-US" sz="1800" dirty="0"/>
           </a:p>
           <a:p>
             <a:pPr algn="l" indent="0" marL="0">
@@ -10056,7 +10056,7 @@
               <a:buNone/>
             </a:pPr>
             <a:r>
-              <a:rPr lang="en-US" sz="2000" b="1" dirty="0">
+              <a:rPr lang="en-US" sz="1800" b="1" dirty="0">
                 <a:solidFill>
                   <a:srgbClr val="B8862B"/>
                 </a:solidFill>
@@ -10073,7 +10073,7 @@
               <a:buNone/>
             </a:pPr>
             <a:r>
-              <a:rPr lang="en-US" sz="2000" dirty="0">
+              <a:rPr lang="en-US" sz="1800" dirty="0">
                 <a:solidFill>
                   <a:srgbClr val="1E2229"/>
                 </a:solidFill>
@@ -10081,9 +10081,9 @@
                 <a:ea typeface="Calibri" pitchFamily="34" charset="-122"/>
                 <a:cs typeface="Calibri" pitchFamily="34" charset="-120"/>
               </a:rPr>
-              <a:t>Macbeth admits his mind is “full of scorpions”, an image of thoughts that sting and poison him.</a:t>
-            </a:r>
-            <a:endParaRPr lang="en-US" sz="2000" dirty="0"/>
+              <a:t>Macbeth is scared. Quote: “O, full of scorpions is my mind, dear wife!”</a:t>
+            </a:r>
+            <a:endParaRPr lang="en-US" sz="1800" dirty="0"/>
           </a:p>
           <a:p>
             <a:pPr algn="l" indent="0" marL="0">
@@ -10093,7 +10093,7 @@
               <a:buNone/>
             </a:pPr>
             <a:r>
-              <a:rPr lang="en-US" sz="2000" b="1" dirty="0">
+              <a:rPr lang="en-US" sz="1800" b="1" dirty="0">
                 <a:solidFill>
                   <a:srgbClr val="B8862B"/>
                 </a:solidFill>
@@ -10110,7 +10110,7 @@
               <a:buNone/>
             </a:pPr>
             <a:r>
-              <a:rPr lang="en-US" sz="2000" dirty="0">
+              <a:rPr lang="en-US" sz="1800" dirty="0">
                 <a:solidFill>
                   <a:srgbClr val="1E2229"/>
                 </a:solidFill>
@@ -10118,9 +10118,9 @@
                 <a:ea typeface="Calibri" pitchFamily="34" charset="-122"/>
                 <a:cs typeface="Calibri" pitchFamily="34" charset="-120"/>
               </a:rPr>
-              <a:t>“O, full of scorpions is my mind, dear wife!” This shows he is scared.</a:t>
-            </a:r>
-            <a:endParaRPr lang="en-US" sz="2000" dirty="0"/>
+              <a:t>Macbeth admits his mind is “full of scorpions”, an image of thoughts that sting and poison him.</a:t>
+            </a:r>
+            <a:endParaRPr lang="en-US" sz="1800" dirty="0"/>
           </a:p>
           <a:p>
             <a:pPr algn="l" indent="0" marL="0">
@@ -10130,7 +10130,7 @@
               <a:buNone/>
             </a:pPr>
             <a:r>
-              <a:rPr lang="en-US" sz="2000" b="1" dirty="0">
+              <a:rPr lang="en-US" sz="1800" b="1" dirty="0">
                 <a:solidFill>
                   <a:srgbClr val="B8862B"/>
                 </a:solidFill>
@@ -10147,7 +10147,7 @@
               <a:buNone/>
             </a:pPr>
             <a:r>
-              <a:rPr lang="en-US" sz="2000" dirty="0">
+              <a:rPr lang="en-US" sz="1800" dirty="0">
                 <a:solidFill>
                   <a:srgbClr val="1E2229"/>
                 </a:solidFill>
@@ -10155,9 +10155,9 @@
                 <a:ea typeface="Calibri" pitchFamily="34" charset="-122"/>
                 <a:cs typeface="Calibri" pitchFamily="34" charset="-120"/>
               </a:rPr>
-              <a:t>Macbeth says a quote about scorpions in Act 3.</a:t>
-            </a:r>
-            <a:endParaRPr lang="en-US" sz="2000" dirty="0"/>
+              <a:t>“O, full of scorpions is my mind, dear wife!” This shows he is scared.</a:t>
+            </a:r>
+            <a:endParaRPr lang="en-US" sz="1800" dirty="0"/>
           </a:p>
         </p:txBody>
       </p:sp>
@@ -10556,7 +10556,7 @@
                 <a:ea typeface="Calibri" pitchFamily="34" charset="-122"/>
                 <a:cs typeface="Calibri" pitchFamily="34" charset="-120"/>
               </a:rPr>
-              <a:t>C   AO3</a:t>
+              <a:t>A   AO3</a:t>
             </a:r>
             <a:endParaRPr lang="en-US" sz="2200" dirty="0"/>
           </a:p>
@@ -11036,7 +11036,7 @@
                 <a:ea typeface="Calibri" pitchFamily="34" charset="-122"/>
                 <a:cs typeface="Calibri" pitchFamily="34" charset="-120"/>
               </a:rPr>
-              <a:t>B   Macbeth admits his mind is “full of scorpions”, an image of thoughts that sting and poison him.</a:t>
+              <a:t>C   Macbeth admits his mind is “full of scorpions”, an image of thoughts that sting and poison him.</a:t>
             </a:r>
             <a:endParaRPr lang="en-US" sz="2200" dirty="0"/>
           </a:p>

--- a/decks/englit-macbeth/englit-macbeth_ch6_exam-essay-skills.pptx
+++ b/decks/englit-macbeth/englit-macbeth_ch6_exam-essay-skills.pptx
@@ -124,35 +124,35 @@
   <p:extLst>
     <p:ext uri="{521415D9-36F7-43E2-AB2F-B90AF26B5E84}">
       <p14:sectionLst xmlns:p14="http://schemas.microsoft.com/office/powerpoint/2010/main">
-        <p14:section name="Opening" id="{4565dad7-d320-86e2-55eb-907ce0e590f9}">
+        <p14:section name="Opening" id="{0e93549c-c6ac-1837-f179-6f361e1b5b9e}">
           <p14:sldIdLst>
             <p14:sldId id="256"/>
           </p14:sldIdLst>
         </p14:section>
-        <p14:section name="Gate" id="{3b730b44-ac8b-2df3-324e-aabdce77ed02}">
+        <p14:section name="Gate" id="{165af8e2-665c-efc5-40c6-c1ccc77d78de}">
           <p14:sldIdLst>
             <p14:sldId id="257"/>
             <p14:sldId id="258"/>
           </p14:sldIdLst>
         </p14:section>
-        <p14:section name="Pre-teach" id="{2a533f3a-bc99-52bc-fc02-ef8fe8e6a1ba}">
+        <p14:section name="Pre-teach" id="{82f25ab3-1745-5fbe-341c-16cf5ff07a3d}">
           <p14:sldIdLst>
             <p14:sldId id="259"/>
           </p14:sldIdLst>
         </p14:section>
-        <p14:section name="Read-along" id="{f607868d-7832-1852-0404-ced396d203ed}">
+        <p14:section name="Read-along" id="{082ccd4b-e450-0006-a924-1ca078132520}">
           <p14:sldIdLst>
             <p14:sldId id="260"/>
           </p14:sldIdLst>
         </p14:section>
-        <p14:section name="Teach" id="{c553d624-b2c9-34e2-9446-c9d6d6945341}">
+        <p14:section name="Teach" id="{3a776cd5-4761-1c96-2b10-89bef69d2dcf}">
           <p14:sldIdLst>
             <p14:sldId id="261"/>
             <p14:sldId id="262"/>
             <p14:sldId id="263"/>
           </p14:sldIdLst>
         </p14:section>
-        <p14:section name="Routes" id="{8a136471-b943-c29a-f7e2-28228cdc598a}">
+        <p14:section name="Routes" id="{59bb19d9-b833-503b-799a-6d9668ce491a}">
           <p14:sldIdLst>
             <p14:sldId id="264"/>
             <p14:sldId id="265"/>
@@ -161,12 +161,12 @@
             <p14:sldId id="268"/>
           </p14:sldIdLst>
         </p14:section>
-        <p14:section name="Close" id="{5cae2293-b293-4094-22ad-4cda1862ecbb}">
+        <p14:section name="Close" id="{33d2a08d-ea24-fe97-bb59-085ae70685dc}">
           <p14:sldIdLst>
             <p14:sldId id="269"/>
           </p14:sldIdLst>
         </p14:section>
-        <p14:section name="Answers" id="{58e695c0-8a14-2600-51ff-28de9043e810}">
+        <p14:section name="Answers" id="{f859583a-d2b4-9af1-8bbb-db9dda5cd40b}">
           <p14:sldIdLst>
             <p14:sldId id="270"/>
             <p14:sldId id="271"/>
